--- a/documents/Simulation-of-predatory-evolution-draft.pptx
+++ b/documents/Simulation-of-predatory-evolution-draft.pptx
@@ -110,6 +110,11 @@
       </a:defRPr>
     </a:lvl9pPr>
   </p:defaultTextStyle>
+  <p:extLst>
+    <p:ext uri="{EFAFB233-063F-42B5-8137-9DF3F51BA10A}">
+      <p15:sldGuideLst xmlns:p15="http://schemas.microsoft.com/office/powerpoint/2012/main"/>
+    </p:ext>
+  </p:extLst>
 </p:presentation>
 </file>
 
@@ -4081,7 +4086,7 @@
           <a:p>
             <a:fld id="{2858D1E8-0FC7-4EFC-871B-71803F17D665}" type="datetimeFigureOut">
               <a:rPr lang="en-US" smtClean="0"/>
-              <a:t>7/16/2026</a:t>
+              <a:t>7/26/2026</a:t>
             </a:fld>
             <a:endParaRPr lang="en-US"/>
           </a:p>
@@ -4379,7 +4384,7 @@
           <a:p>
             <a:fld id="{2858D1E8-0FC7-4EFC-871B-71803F17D665}" type="datetimeFigureOut">
               <a:rPr lang="en-US" smtClean="0"/>
-              <a:t>7/16/2026</a:t>
+              <a:t>7/26/2026</a:t>
             </a:fld>
             <a:endParaRPr lang="en-US"/>
           </a:p>
@@ -4571,7 +4576,7 @@
           <a:p>
             <a:fld id="{2858D1E8-0FC7-4EFC-871B-71803F17D665}" type="datetimeFigureOut">
               <a:rPr lang="en-US" smtClean="0"/>
-              <a:t>7/16/2026</a:t>
+              <a:t>7/26/2026</a:t>
             </a:fld>
             <a:endParaRPr lang="en-US"/>
           </a:p>
@@ -4832,7 +4837,7 @@
           <a:p>
             <a:fld id="{2858D1E8-0FC7-4EFC-871B-71803F17D665}" type="datetimeFigureOut">
               <a:rPr lang="en-US" smtClean="0"/>
-              <a:t>7/16/2026</a:t>
+              <a:t>7/26/2026</a:t>
             </a:fld>
             <a:endParaRPr lang="en-US"/>
           </a:p>
@@ -5256,7 +5261,7 @@
           <a:p>
             <a:fld id="{2858D1E8-0FC7-4EFC-871B-71803F17D665}" type="datetimeFigureOut">
               <a:rPr lang="en-US" smtClean="0"/>
-              <a:t>7/16/2026</a:t>
+              <a:t>7/26/2026</a:t>
             </a:fld>
             <a:endParaRPr lang="en-US"/>
           </a:p>
@@ -5793,7 +5798,7 @@
           <a:p>
             <a:fld id="{2858D1E8-0FC7-4EFC-871B-71803F17D665}" type="datetimeFigureOut">
               <a:rPr lang="en-US" smtClean="0"/>
-              <a:t>7/16/2026</a:t>
+              <a:t>7/26/2026</a:t>
             </a:fld>
             <a:endParaRPr lang="en-US"/>
           </a:p>
@@ -6657,7 +6662,7 @@
           <a:p>
             <a:fld id="{2858D1E8-0FC7-4EFC-871B-71803F17D665}" type="datetimeFigureOut">
               <a:rPr lang="en-US" smtClean="0"/>
-              <a:t>7/16/2026</a:t>
+              <a:t>7/26/2026</a:t>
             </a:fld>
             <a:endParaRPr lang="en-US"/>
           </a:p>
@@ -6827,7 +6832,7 @@
           <a:p>
             <a:fld id="{2858D1E8-0FC7-4EFC-871B-71803F17D665}" type="datetimeFigureOut">
               <a:rPr lang="en-US" smtClean="0"/>
-              <a:t>7/16/2026</a:t>
+              <a:t>7/26/2026</a:t>
             </a:fld>
             <a:endParaRPr lang="en-US"/>
           </a:p>
@@ -7011,7 +7016,7 @@
           <a:p>
             <a:fld id="{2858D1E8-0FC7-4EFC-871B-71803F17D665}" type="datetimeFigureOut">
               <a:rPr lang="en-US" smtClean="0"/>
-              <a:t>7/16/2026</a:t>
+              <a:t>7/26/2026</a:t>
             </a:fld>
             <a:endParaRPr lang="en-US"/>
           </a:p>
@@ -7181,7 +7186,7 @@
           <a:p>
             <a:fld id="{2858D1E8-0FC7-4EFC-871B-71803F17D665}" type="datetimeFigureOut">
               <a:rPr lang="en-US" smtClean="0"/>
-              <a:t>7/16/2026</a:t>
+              <a:t>7/26/2026</a:t>
             </a:fld>
             <a:endParaRPr lang="en-US"/>
           </a:p>
@@ -7425,7 +7430,7 @@
           <a:p>
             <a:fld id="{2858D1E8-0FC7-4EFC-871B-71803F17D665}" type="datetimeFigureOut">
               <a:rPr lang="en-US" smtClean="0"/>
-              <a:t>7/16/2026</a:t>
+              <a:t>7/26/2026</a:t>
             </a:fld>
             <a:endParaRPr lang="en-US"/>
           </a:p>
@@ -7661,7 +7666,7 @@
           <a:p>
             <a:fld id="{2858D1E8-0FC7-4EFC-871B-71803F17D665}" type="datetimeFigureOut">
               <a:rPr lang="en-US" smtClean="0"/>
-              <a:t>7/16/2026</a:t>
+              <a:t>7/26/2026</a:t>
             </a:fld>
             <a:endParaRPr lang="en-US"/>
           </a:p>
@@ -8127,7 +8132,7 @@
           <a:p>
             <a:fld id="{2858D1E8-0FC7-4EFC-871B-71803F17D665}" type="datetimeFigureOut">
               <a:rPr lang="en-US" smtClean="0"/>
-              <a:t>7/16/2026</a:t>
+              <a:t>7/26/2026</a:t>
             </a:fld>
             <a:endParaRPr lang="en-US"/>
           </a:p>
@@ -8245,7 +8250,7 @@
           <a:p>
             <a:fld id="{2858D1E8-0FC7-4EFC-871B-71803F17D665}" type="datetimeFigureOut">
               <a:rPr lang="en-US" smtClean="0"/>
-              <a:t>7/16/2026</a:t>
+              <a:t>7/26/2026</a:t>
             </a:fld>
             <a:endParaRPr lang="en-US"/>
           </a:p>
@@ -8340,7 +8345,7 @@
           <a:p>
             <a:fld id="{2858D1E8-0FC7-4EFC-871B-71803F17D665}" type="datetimeFigureOut">
               <a:rPr lang="en-US" smtClean="0"/>
-              <a:t>7/16/2026</a:t>
+              <a:t>7/26/2026</a:t>
             </a:fld>
             <a:endParaRPr lang="en-US"/>
           </a:p>
@@ -8595,7 +8600,7 @@
           <a:p>
             <a:fld id="{2858D1E8-0FC7-4EFC-871B-71803F17D665}" type="datetimeFigureOut">
               <a:rPr lang="en-US" smtClean="0"/>
-              <a:t>7/16/2026</a:t>
+              <a:t>7/26/2026</a:t>
             </a:fld>
             <a:endParaRPr lang="en-US"/>
           </a:p>
@@ -8895,7 +8900,7 @@
           <a:p>
             <a:fld id="{2858D1E8-0FC7-4EFC-871B-71803F17D665}" type="datetimeFigureOut">
               <a:rPr lang="en-US" smtClean="0"/>
-              <a:t>7/16/2026</a:t>
+              <a:t>7/26/2026</a:t>
             </a:fld>
             <a:endParaRPr lang="en-US"/>
           </a:p>
@@ -9129,7 +9134,7 @@
           <a:p>
             <a:fld id="{2858D1E8-0FC7-4EFC-871B-71803F17D665}" type="datetimeFigureOut">
               <a:rPr lang="en-US" smtClean="0"/>
-              <a:t>7/16/2026</a:t>
+              <a:t>7/26/2026</a:t>
             </a:fld>
             <a:endParaRPr lang="en-US"/>
           </a:p>
@@ -10693,10 +10698,10 @@
       </p:sp>
       <p:pic>
         <p:nvPicPr>
-          <p:cNvPr id="5" name="Content Placeholder 4">
+          <p:cNvPr id="7" name="Picture 6">
             <a:extLst>
               <a:ext uri="{FF2B5EF4-FFF2-40B4-BE49-F238E27FC236}">
-                <a16:creationId xmlns:a16="http://schemas.microsoft.com/office/drawing/2014/main" id="{8DF2C597-BE4F-928D-DADA-5DEEDA484F76}"/>
+                <a16:creationId xmlns:a16="http://schemas.microsoft.com/office/drawing/2014/main" id="{2062035E-4337-4730-F1A4-5231FE9B2A07}"/>
               </a:ext>
             </a:extLst>
           </p:cNvPr>
@@ -10713,8 +10718,8 @@
         </p:blipFill>
         <p:spPr>
           <a:xfrm>
-            <a:off x="3736259" y="673652"/>
-            <a:ext cx="8285536" cy="5696307"/>
+            <a:off x="4829174" y="59315"/>
+            <a:ext cx="6791325" cy="6741535"/>
           </a:xfrm>
           <a:prstGeom prst="rect">
             <a:avLst/>
